--- a/docs/architecture_presentation.pptx
+++ b/docs/architecture_presentation.pptx
@@ -10319,68 +10319,6 @@
       </p:sp>
       <p:sp>
         <p:nvSpPr>
-          <p:cNvPr id="5" name="Text 3"/>
-          <p:cNvSpPr txBox="1"/>
-          <p:nvPr/>
-        </p:nvSpPr>
-        <p:spPr>
-          <a:xfrm>
-            <a:off x="731520" y="3108960"/>
-            <a:ext cx="6400800" cy="1463040"/>
-          </a:xfrm>
-          <a:prstGeom prst="rect">
-            <a:avLst/>
-          </a:prstGeom>
-          <a:noFill/>
-          <a:ln/>
-        </p:spPr>
-        <p:txBody>
-          <a:bodyPr wrap="square" lIns="0" tIns="0" rIns="0" bIns="0" rtlCol="0" anchor="ctr"/>
-          <a:lstStyle/>
-          <a:p>
-            <a:pPr marL="0" indent="0" algn="ctr">
-              <a:buNone/>
-            </a:pPr>
-            <a:r>
-              <a:rPr lang="en-US" sz="1500" b="1" dirty="0">
-                <a:solidFill>
-                  <a:srgbClr val="C62828"/>
-                </a:solidFill>
-                <a:latin typeface="Calibri" pitchFamily="34" charset="0"/>
-                <a:ea typeface="Calibri" pitchFamily="34" charset="-122"/>
-                <a:cs typeface="Calibri" pitchFamily="34" charset="-120"/>
-              </a:rPr>
-              <a:t>[ PASTE SCREENSHOT HERE ]</a:t>
-            </a:r>
-            <a:endParaRPr lang="en-US" sz="1500" dirty="0"/>
-          </a:p>
-          <a:p>
-            <a:pPr marL="0" indent="0" algn="ctr">
-              <a:buNone/>
-            </a:pPr>
-            <a:endParaRPr lang="en-US" sz="1500" dirty="0"/>
-          </a:p>
-          <a:p>
-            <a:pPr marL="0" indent="0" algn="ctr">
-              <a:buNone/>
-            </a:pPr>
-            <a:r>
-              <a:rPr lang="en-US" sz="1500" b="1" dirty="0">
-                <a:solidFill>
-                  <a:srgbClr val="C62828"/>
-                </a:solidFill>
-                <a:latin typeface="Calibri" pitchFamily="34" charset="0"/>
-                <a:ea typeface="Calibri" pitchFamily="34" charset="-122"/>
-                <a:cs typeface="Calibri" pitchFamily="34" charset="-120"/>
-              </a:rPr>
-              <a:t>Red, failed GitHub Actions run showing the secret-scan gate blocking the commit.</a:t>
-            </a:r>
-            <a:endParaRPr lang="en-US" sz="1500" dirty="0"/>
-          </a:p>
-        </p:txBody>
-      </p:sp>
-      <p:sp>
-        <p:nvSpPr>
           <p:cNvPr id="6" name="Shape 4"/>
           <p:cNvSpPr/>
           <p:nvPr/>
@@ -10583,6 +10521,30 @@
           </a:p>
         </p:txBody>
       </p:sp>
+      <p:pic>
+        <p:nvPicPr>
+          <p:cNvPr id="9" name="Picture 8"/>
+          <p:cNvPicPr>
+            <a:picLocks noChangeAspect="1"/>
+          </p:cNvPicPr>
+          <p:nvPr/>
+        </p:nvPicPr>
+        <p:blipFill>
+          <a:blip r:embed="rId3"/>
+          <a:stretch>
+            <a:fillRect/>
+          </a:stretch>
+        </p:blipFill>
+        <p:spPr>
+          <a:xfrm>
+            <a:off x="673341" y="2168652"/>
+            <a:ext cx="6517157" cy="3343656"/>
+          </a:xfrm>
+          <a:prstGeom prst="rect">
+            <a:avLst/>
+          </a:prstGeom>
+        </p:spPr>
+      </p:pic>
     </p:spTree>
   </p:cSld>
   <p:clrMapOvr>
